--- a/docs/TripTogether_Design_System.pptx
+++ b/docs/TripTogether_Design_System.pptx
@@ -4913,7 +4913,7 @@
                 <a:ea typeface="Plus Jakarta Sans" pitchFamily="34" charset="-122"/>
                 <a:cs typeface="Plus Jakarta Sans" pitchFamily="34" charset="-120"/>
               </a:rPr>
-              <a:t>Reserve terracotta for the one primary action per screen</a:t>
+              <a:t>Reserve terracotta for one primary action — its caption may share the hue</a:t>
             </a:r>
             <a:endParaRPr lang="en-US" sz="1150" dirty="0"/>
           </a:p>
@@ -4972,7 +4972,7 @@
                 <a:ea typeface="Plus Jakarta Sans" pitchFamily="34" charset="-122"/>
                 <a:cs typeface="Plus Jakarta Sans" pitchFamily="34" charset="-120"/>
               </a:rPr>
-              <a:t>Use milestone green only for genuine progress/completion</a:t>
+              <a:t>Use milestone green for completion, decided items &amp; urgency thresholds</a:t>
             </a:r>
             <a:endParaRPr lang="en-US" sz="1150" dirty="0"/>
           </a:p>
@@ -7508,7 +7508,7 @@
                 <a:ea typeface="Plus Jakarta Sans" pitchFamily="34" charset="-122"/>
                 <a:cs typeface="Plus Jakarta Sans" pitchFamily="34" charset="-120"/>
               </a:rPr>
-              <a:t>Structural color — headers, active nav, card accents.</a:t>
+              <a:t>Wordmark, buttons, active states — not headers.</a:t>
             </a:r>
             <a:endParaRPr lang="en-US" sz="1050" dirty="0"/>
           </a:p>
@@ -7723,7 +7723,7 @@
                 <a:ea typeface="Plus Jakarta Sans" pitchFamily="34" charset="-122"/>
                 <a:cs typeface="Plus Jakarta Sans" pitchFamily="34" charset="-120"/>
               </a:rPr>
-              <a:t>Reserved for the one primary action per screen.</a:t>
+              <a:t>One primary action per screen — label included.</a:t>
             </a:r>
             <a:endParaRPr lang="en-US" sz="1050" dirty="0"/>
           </a:p>
@@ -7938,7 +7938,7 @@
                 <a:ea typeface="Plus Jakarta Sans" pitchFamily="34" charset="-122"/>
                 <a:cs typeface="Plus Jakarta Sans" pitchFamily="34" charset="-120"/>
               </a:rPr>
-              <a:t>Countdown pills, icon badges, warm surfaces.</a:t>
+              <a:t>Icon badges, inactive chips, callout boxes.</a:t>
             </a:r>
             <a:endParaRPr lang="en-US" sz="1050" dirty="0"/>
           </a:p>
@@ -8114,7 +8114,7 @@
                 <a:ea typeface="Plus Jakarta Sans" pitchFamily="34" charset="-122"/>
                 <a:cs typeface="Plus Jakarta Sans" pitchFamily="34" charset="-120"/>
               </a:rPr>
-              <a:t>Progress &amp; Success</a:t>
+              <a:t>Decided &amp; Completion</a:t>
             </a:r>
             <a:endParaRPr lang="en-US" sz="1050" dirty="0"/>
           </a:p>
@@ -8153,7 +8153,7 @@
                 <a:ea typeface="Plus Jakarta Sans" pitchFamily="34" charset="-122"/>
                 <a:cs typeface="Plus Jakarta Sans" pitchFamily="34" charset="-120"/>
               </a:rPr>
-              <a:t>Only for genuine completion moments.</a:t>
+              <a:t>Completion &amp; decided state — one open exception.</a:t>
             </a:r>
             <a:endParaRPr lang="en-US" sz="1050" dirty="0"/>
           </a:p>
@@ -8793,7 +8793,7 @@
                 <a:ea typeface="Plus Jakarta Sans" pitchFamily="34" charset="-122"/>
                 <a:cs typeface="Plus Jakarta Sans" pitchFamily="34" charset="-120"/>
               </a:rPr>
-              <a:t>Primary Brand · Structural</a:t>
+              <a:t>Primary Brand · Wordmark &amp; Actions</a:t>
             </a:r>
             <a:endParaRPr lang="en-US" sz="1600" dirty="0"/>
           </a:p>
@@ -8871,7 +8871,7 @@
                 <a:ea typeface="Plus Jakarta Sans" pitchFamily="34" charset="-122"/>
                 <a:cs typeface="Plus Jakarta Sans" pitchFamily="34" charset="-120"/>
               </a:rPr>
-              <a:t>The app's structural color — headers, gradients, card accents, active nav state. Reused, not repeated: a single base value with a lighter step for gradients and a pale tint for badge backgrounds.</a:t>
+              <a:t>The app's primary brand color, confirmed against the live app: the wordmark, solid buttons and active states, gradient photo-card overlays, and the countdown pill. Screen headers are near-black ink (#1A1A1A), not teal — a correction from this deck's first pass.</a:t>
             </a:r>
             <a:endParaRPr lang="en-US" sz="1300" dirty="0"/>
           </a:p>
@@ -9340,7 +9340,7 @@
                 <a:ea typeface="Plus Jakarta Sans" pitchFamily="34" charset="-122"/>
                 <a:cs typeface="Plus Jakarta Sans" pitchFamily="34" charset="-120"/>
               </a:rPr>
-              <a:t>Reserved exclusively for the one primary “tap this to move forward” action per screen. Darkened from an earlier #D4724A after white button text measured 3.33:1 — below WCAG AA. This shade holds ~4.9:1.</a:t>
+              <a:t>The one primary “tap this to move forward” action per screen. Its own caption may share the hue — the floating add button and the label beneath it are one action, not two. Darkened from an earlier #D4724A after white text measured 3.33:1, below WCAG AA; this holds ~4.9:1.</a:t>
             </a:r>
             <a:endParaRPr lang="en-US" sz="1300" dirty="0"/>
           </a:p>
@@ -9809,7 +9809,7 @@
                 <a:ea typeface="Plus Jakarta Sans" pitchFamily="34" charset="-122"/>
                 <a:cs typeface="Plus Jakarta Sans" pitchFamily="34" charset="-120"/>
               </a:rPr>
-              <a:t>A warm neutral used for countdown pills and icon badge backgrounds — part of what keeps the app reading as a paper travel journal rather than admin software.</a:t>
+              <a:t>A warm neutral for secondary UI surfaces — icon badge circles, inactive toggle/chip backgrounds, and callout boxes. No longer used for the countdown pill, which now matches the trip-detail hero's teal treatment everywhere.</a:t>
             </a:r>
             <a:endParaRPr lang="en-US" sz="1300" dirty="0"/>
           </a:p>
@@ -10344,7 +10344,7 @@
                 <a:ea typeface="Plus Jakarta Sans" pitchFamily="34" charset="-122"/>
                 <a:cs typeface="Plus Jakarta Sans" pitchFamily="34" charset="-120"/>
               </a:rPr>
-              <a:t>Progress &amp; Success</a:t>
+              <a:t>Decided &amp; Completion</a:t>
             </a:r>
             <a:endParaRPr lang="en-US" sz="1600" dirty="0"/>
           </a:p>
@@ -10422,7 +10422,7 @@
                 <a:ea typeface="Plus Jakarta Sans" pitchFamily="34" charset="-122"/>
                 <a:cs typeface="Plus Jakarta Sans" pitchFamily="34" charset="-120"/>
               </a:rPr>
-              <a:t>Reserved exclusively for progress/completion moments — a decided category, a fully-decided trip, an imminent countdown. Never used as plain decoration.</a:t>
+              <a:t>Mostly reserved for completion — decided items, a fully-decided trip, and the countdown pill's imminent-departure state (an intentional exception, not literal completion). Open inconsistency: the Home/My Trips progress bar fill is always milestone green, even while its label still reads “In progress.”</a:t>
             </a:r>
             <a:endParaRPr lang="en-US" sz="1300" dirty="0"/>
           </a:p>
